--- a/data-eng/decks/w2d3s3.pptx
+++ b/data-eng/decks/w2d3s3.pptx
@@ -3959,7 +3959,7 @@
                 <a:ea typeface="Pretendard"/>
                 <a:cs typeface="Pretendard"/>
               </a:rPr>
-              <a:t>프롬프트 앞에 (.venv) · pymongo 버전 출력</a:t>
+              <a:t>(.venv) · pymongo 4.18.2 · sys.prefix 가 …/.venv</a:t>
             </a:r>
           </a:p>
         </p:txBody>
@@ -4105,7 +4105,7 @@
                 <a:ea typeface="Pretendard"/>
                 <a:cs typeface="Pretendard"/>
               </a:rPr>
-              <a:t>inserted: 1000 · countDocuments() 가 1003</a:t>
+              <a:t>deleted: 0 / inserted: 1000 · 두 번 돌려도 1003</a:t>
             </a:r>
           </a:p>
         </p:txBody>
@@ -4251,7 +4251,7 @@
                 <a:ea typeface="Pretendard"/>
                 <a:cs typeface="Pretendard"/>
               </a:rPr>
-              <a:t>레벨별 INFO 최다 · ERROR 경로 순위 내림차순</a:t>
+              <a:t>INFO 587 · WARN 214 · ERROR 202, ERROR 경로 1위 /api/pay 47</a:t>
             </a:r>
           </a:p>
         </p:txBody>
@@ -4397,7 +4397,7 @@
                 <a:ea typeface="Pretendard"/>
                 <a:cs typeface="Pretendard"/>
               </a:rPr>
-              <a:t>분 단위 10행이 시간 순, cnt 와 errors 가 함께</a:t>
+              <a:t>분 단위 10행 — 09:00 은 cnt 20 · errors 5</a:t>
             </a:r>
           </a:p>
         </p:txBody>
@@ -4543,7 +4543,7 @@
                 <a:ea typeface="Pretendard"/>
                 <a:cs typeface="Pretendard"/>
               </a:rPr>
-              <a:t>totalDocsExamined 약 1,003 → 200 안팎</a:t>
+              <a:t>totalDocsExamined 1003 → 202</a:t>
             </a:r>
           </a:p>
         </p:txBody>
@@ -8502,7 +8502,7 @@
                 <a:ea typeface="Pretendard"/>
                 <a:cs typeface="Pretendard"/>
               </a:rPr>
-              <a:t>python3 -c "import pymongo; print(pymongo.version)" 으로 버전이 나오면 준비 완료</a:t>
+              <a:t>버전 4.18.2 · sys.prefix 가 …/week2/.venv 로 끝나면 준비 완료</a:t>
             </a:r>
           </a:p>
         </p:txBody>
@@ -8707,7 +8707,7 @@
                 <a:ea typeface="Pretendard"/>
                 <a:cs typeface="Pretendard"/>
               </a:rPr>
-              <a:t>WSL2·macOS·리눅스 모두 같은 명령 — 앞으로 파이썬 실습마다 씁니다</a:t>
+              <a:t>우분투·WSL2 는 python3-venv 먼저 · type python3 가 alias 면 unalias 뒤 hash -r — (.venv) 가 붙어도 sys.prefix 가 다르면 가상환경을 건너뛴 것(실측)</a:t>
             </a:r>
           </a:p>
         </p:txBody>
@@ -9304,7 +9304,7 @@
                 <a:ea typeface="Pretendard"/>
                 <a:cs typeface="Pretendard"/>
               </a:rPr>
-              <a:t>1,000건 생성</a:t>
+              <a:t>자기 문서 지우기</a:t>
             </a:r>
           </a:p>
         </p:txBody>
@@ -9379,7 +9379,7 @@
                 <a:ea typeface="Pretendard"/>
                 <a:cs typeface="Pretendard"/>
               </a:rPr>
-              <a:t>ts 3초 간격</a:t>
+              <a:t>source: load_logs</a:t>
             </a:r>
           </a:p>
           <a:p>
@@ -9397,7 +9397,7 @@
                 <a:ea typeface="Pretendard"/>
                 <a:cs typeface="Pretendard"/>
               </a:rPr>
-              <a:t>level 가중 랜덤</a:t>
+              <a:t>delete_many</a:t>
             </a:r>
           </a:p>
         </p:txBody>
@@ -9498,7 +9498,7 @@
                 <a:ea typeface="Pretendard"/>
                 <a:cs typeface="Pretendard"/>
               </a:rPr>
-              <a:t>ERROR 만 error</a:t>
+              <a:t>1,000건 생성</a:t>
             </a:r>
           </a:p>
         </p:txBody>
@@ -9573,7 +9573,7 @@
                 <a:ea typeface="Pretendard"/>
                 <a:cs typeface="Pretendard"/>
               </a:rPr>
-              <a:t>code·message</a:t>
+              <a:t>random.seed(42)</a:t>
             </a:r>
           </a:p>
           <a:p>
@@ -9591,7 +9591,7 @@
                 <a:ea typeface="Pretendard"/>
                 <a:cs typeface="Pretendard"/>
               </a:rPr>
-              <a:t>중첩 필드 추가</a:t>
+              <a:t>ts 3초 간격</a:t>
             </a:r>
           </a:p>
         </p:txBody>
@@ -9860,7 +9860,7 @@
                 <a:ea typeface="Pretendard"/>
                 <a:cs typeface="Pretendard"/>
               </a:rPr>
-              <a:t>levels = ['INFO','INFO','INFO','WARN','ERROR'] — INFO 가 자주 나오게 가중 · status 는 ERROR 면 500</a:t>
+              <a:t>시드 42 — 누가 돌려도 같은 1,000건 · ERROR 에만 error{code, message} 중첩 · INFO 가 자주 나오게 가중</a:t>
             </a:r>
           </a:p>
         </p:txBody>
@@ -9901,7 +9901,7 @@
                 <a:ea typeface="Pretendard"/>
                 <a:cs typeface="Pretendard"/>
               </a:rPr>
-              <a:t>python3 load_logs.py → inserted: 1000 · mongosh 의 countDocuments() 는 1003 (2챕터에서 남은 3건 + 1,000건)</a:t>
+              <a:t>deleted: 0 / inserted: 1000 · countDocuments() 1003 — 다시 들어갈 땐 mongosh logdb 로(그냥 mongosh 면 test DB 라 0)</a:t>
             </a:r>
           </a:p>
         </p:txBody>
@@ -10203,7 +10203,7 @@
                 <a:ea typeface="Pretendard"/>
                 <a:cs typeface="Pretendard"/>
               </a:rPr>
-              <a:t>두 번 실행하면 2,000건 — DB 가 중복을 막지 않는다</a:t>
+              <a:t>두 번 돌려도 1003 — 먼저 지우고 다시 넣는다</a:t>
             </a:r>
           </a:p>
         </p:txBody>
@@ -10274,7 +10274,7 @@
                 <a:ea typeface="Pretendard"/>
                 <a:cs typeface="Pretendard"/>
               </a:rPr>
-              <a:t>왜 막지 않나</a:t>
+              <a:t>지우는 줄이 없으면</a:t>
             </a:r>
           </a:p>
         </p:txBody>
@@ -10315,7 +10315,7 @@
                 <a:ea typeface="Pretendard"/>
                 <a:cs typeface="Pretendard"/>
               </a:rPr>
-              <a:t>_id 를 직접 지정하지 않아 중복 검사가 없다</a:t>
+              <a:t>두 번째에 1,000건이 또 들어가 2003건(실측)</a:t>
             </a:r>
           </a:p>
         </p:txBody>
@@ -10420,7 +10420,7 @@
                 <a:ea typeface="Pretendard"/>
                 <a:cs typeface="Pretendard"/>
               </a:rPr>
-              <a:t>스크립트는 실행할 때마다 새 문서 1,000건을 만든다</a:t>
+              <a:t>자동 _id 는 매번 새 값 — 중복 검사가 없다</a:t>
             </a:r>
           </a:p>
         </p:txBody>
@@ -10491,7 +10491,7 @@
                 <a:ea typeface="Pretendard"/>
                 <a:cs typeface="Pretendard"/>
               </a:rPr>
-              <a:t>자동 _id 는 매번 새 값 — 같은 내용이라도 다른 문서</a:t>
+              <a:t>오류 없이 집계 숫자만 조용히 두 배</a:t>
             </a:r>
           </a:p>
         </p:txBody>
@@ -10532,7 +10532,7 @@
                 <a:ea typeface="Pretendard"/>
                 <a:cs typeface="Pretendard"/>
               </a:rPr>
-              <a:t>되돌리기 · 막기</a:t>
+              <a:t>이 스크립트는</a:t>
             </a:r>
           </a:p>
         </p:txBody>
@@ -10573,7 +10573,7 @@
                 <a:ea typeface="Pretendard"/>
                 <a:cs typeface="Pretendard"/>
               </a:rPr>
-              <a:t>다시 적재하려면 먼저 비운다</a:t>
+              <a:t>source 표시로 자기 문서만 지우고 다시 넣는다</a:t>
             </a:r>
           </a:p>
         </p:txBody>
@@ -10678,7 +10678,7 @@
                 <a:ea typeface="Pretendard"/>
                 <a:cs typeface="Pretendard"/>
               </a:rPr>
-              <a:t>mongosh: db.access_logs.deleteMany({})</a:t>
+              <a:t>두 번째: deleted: 1000 / inserted: 1000 → 1003</a:t>
             </a:r>
           </a:p>
         </p:txBody>
@@ -10749,7 +10749,7 @@
                 <a:ea typeface="Pretendard"/>
                 <a:cs typeface="Pretendard"/>
               </a:rPr>
-              <a:t>실무는 자연키에 유니크 인덱스 — 중복은 DB 가 막게</a:t>
+              <a:t>몇 번 돌려도 같은 결과 — 멱등(idempotent)</a:t>
             </a:r>
           </a:p>
         </p:txBody>
@@ -11590,7 +11590,7 @@
                 <a:ea typeface="Pretendard"/>
                 <a:cs typeface="Pretendard"/>
               </a:rPr>
-              <a:t>INFO 가 가장 많다(600 전후)</a:t>
+              <a:t>INFO 587 · WARN 214 · ERROR 202</a:t>
             </a:r>
           </a:p>
         </p:txBody>
@@ -11815,7 +11815,7 @@
                 <a:ea typeface="Pretendard"/>
                 <a:cs typeface="Pretendard"/>
               </a:rPr>
-              <a:t>errors 내림차순</a:t>
+              <a:t>/api/pay 47 이 1위</a:t>
             </a:r>
           </a:p>
         </p:txBody>
@@ -12040,7 +12040,7 @@
                 <a:ea typeface="Pretendard"/>
                 <a:cs typeface="Pretendard"/>
               </a:rPr>
-              <a:t>조합 상위 5</a:t>
+              <a:t>(INFO, /login) 125가 1위</a:t>
             </a:r>
           </a:p>
         </p:txBody>
@@ -12265,7 +12265,7 @@
                 <a:ea typeface="Pretendard"/>
                 <a:cs typeface="Pretendard"/>
               </a:rPr>
-              <a:t>ERROR 섞이면 200 보다 크다</a:t>
+              <a:t>/api/pay 267.1 이 최고</a:t>
             </a:r>
           </a:p>
         </p:txBody>
@@ -12490,7 +12490,7 @@
                 <a:ea typeface="Pretendard"/>
                 <a:cs typeface="Pretendard"/>
               </a:rPr>
-              <a:t>10행 · cnt 와 errors 함께</a:t>
+              <a:t>09:00 은 cnt 20 · errors 5</a:t>
             </a:r>
           </a:p>
         </p:txBody>
@@ -12531,7 +12531,7 @@
                 <a:ea typeface="Pretendard"/>
                 <a:cs typeface="Pretendard"/>
               </a:rPr>
-              <a:t>match → group → sort 를 SQL 의 WHERE → GROUP BY → ORDER BY 와 대응해 읽는다 · $cond 는 CASE WHEN</a:t>
+              <a:t>건수가 같으면 순서가 바뀔 수 있어 $sort 에 _id: 1 을 보조 기준으로(2-2 동점과 같은 이유) · $cond 는 CASE WHEN</a:t>
             </a:r>
           </a:p>
         </p:txBody>
@@ -13050,7 +13050,7 @@
                 <a:ea typeface="Pretendard"/>
                 <a:cs typeface="Pretendard"/>
               </a:rPr>
-              <a:t>totalDocsExamined 가 약 1,003 — 전체 문서를 훑는다</a:t>
+              <a:t>totalDocsExamined 1003 — 전체 문서를 훑는다</a:t>
             </a:r>
           </a:p>
         </p:txBody>
@@ -13424,7 +13424,7 @@
                 <a:ea typeface="Pretendard"/>
                 <a:cs typeface="Pretendard"/>
               </a:rPr>
-              <a:t>ERROR 건수(200 안팎)만 훑으면 성공 — 줄지 않았다면 인덱스를 안 탄 것, 필드 이름을 다시</a:t>
+              <a:t>ERROR 건수 202만 훑으면 성공 — 줄지 않았다면 인덱스를 안 탄 것, 필드 이름을 다시</a:t>
             </a:r>
           </a:p>
         </p:txBody>
@@ -14313,7 +14313,7 @@
                 <a:ea typeface="Pretendard"/>
                 <a:cs typeface="Pretendard"/>
               </a:rPr>
-              <a:t>$match ERROR → _id: '$error.code'</a:t>
+              <a:t>_id: '$error.code'</a:t>
             </a:r>
           </a:p>
           <a:p>
@@ -14477,7 +14477,7 @@
                 <a:ea typeface="Pretendard"/>
                 <a:cs typeface="Pretendard"/>
               </a:rPr>
-              <a:t>$match 위치 비교</a:t>
+              <a:t>$match 를 뒤로</a:t>
             </a:r>
           </a:p>
           <a:p>
@@ -14498,7 +14498,7 @@
                 <a:ea typeface="Pretendard"/>
                 <a:cs typeface="Pretendard"/>
               </a:rPr>
-              <a:t>맨 앞 vs $group 뒤</a:t>
+              <a:t>$group 뒤로 옮기면</a:t>
             </a:r>
           </a:p>
           <a:p>
@@ -14516,7 +14516,7 @@
                 <a:ea typeface="Pretendard"/>
                 <a:cs typeface="Pretendard"/>
               </a:rPr>
-              <a:t>explain 결과 차이</a:t>
+              <a:t>결과가 빈다 — 왜?</a:t>
             </a:r>
           </a:p>
         </p:txBody>
@@ -14587,7 +14587,7 @@
                 <a:ea typeface="Pretendard"/>
                 <a:cs typeface="Pretendard"/>
               </a:rPr>
-              <a:t>상위 5명이 각 20건 안팎, 에러 코드별 _id 가 null 이 아닌 값으로 나오면 성공</a:t>
+              <a:t>상위 5명 29·29·29·29·28 · 에러 코드 E80 8건이 1위 · 셋째는 빈 결과 — $group 뒤엔 level 이 없다</a:t>
             </a:r>
           </a:p>
         </p:txBody>

--- a/data-eng/decks/w2d3s3.pptx
+++ b/data-eng/decks/w2d3s3.pptx
@@ -3100,7 +3100,7 @@
       <p:grpSpPr/>
       <p:sp>
         <p:nvSpPr>
-          <p:cNvPr id="2" name="Oval 1"/>
+          <p:cNvPr id="2" name="deckgen:decor"/>
           <p:cNvSpPr/>
           <p:nvPr/>
         </p:nvSpPr>
@@ -3130,7 +3130,7 @@
       </p:sp>
       <p:sp>
         <p:nvSpPr>
-          <p:cNvPr id="3" name="Oval 2"/>
+          <p:cNvPr id="3" name="deckgen:decor"/>
           <p:cNvSpPr/>
           <p:nvPr/>
         </p:nvSpPr>
@@ -3160,7 +3160,7 @@
       </p:sp>
       <p:sp>
         <p:nvSpPr>
-          <p:cNvPr id="4" name="Oval 3"/>
+          <p:cNvPr id="4" name="deckgen:decor"/>
           <p:cNvSpPr/>
           <p:nvPr/>
         </p:nvSpPr>
@@ -3190,7 +3190,7 @@
       </p:sp>
       <p:sp>
         <p:nvSpPr>
-          <p:cNvPr id="5" name="Rectangle 4"/>
+          <p:cNvPr id="5" name="deckgen:decor"/>
           <p:cNvSpPr/>
           <p:nvPr/>
         </p:nvSpPr>
@@ -3220,7 +3220,7 @@
       </p:sp>
       <p:sp>
         <p:nvSpPr>
-          <p:cNvPr id="6" name="Oval 5"/>
+          <p:cNvPr id="6" name="deckgen:decor"/>
           <p:cNvSpPr/>
           <p:nvPr/>
         </p:nvSpPr>
@@ -3250,7 +3250,7 @@
       </p:sp>
       <p:sp>
         <p:nvSpPr>
-          <p:cNvPr id="7" name="Oval 6"/>
+          <p:cNvPr id="7" name="deckgen:decor"/>
           <p:cNvSpPr/>
           <p:nvPr/>
         </p:nvSpPr>
@@ -3280,7 +3280,7 @@
       </p:sp>
       <p:sp>
         <p:nvSpPr>
-          <p:cNvPr id="8" name="Oval 7"/>
+          <p:cNvPr id="8" name="deckgen:decor"/>
           <p:cNvSpPr/>
           <p:nvPr/>
         </p:nvSpPr>
@@ -3310,7 +3310,7 @@
       </p:sp>
       <p:sp>
         <p:nvSpPr>
-          <p:cNvPr id="9" name="Oval 8"/>
+          <p:cNvPr id="9" name="deckgen:decor"/>
           <p:cNvSpPr/>
           <p:nvPr/>
         </p:nvSpPr>
@@ -3340,7 +3340,7 @@
       </p:sp>
       <p:sp>
         <p:nvSpPr>
-          <p:cNvPr id="10" name="Rectangle 9"/>
+          <p:cNvPr id="10" name="deckgen:decor"/>
           <p:cNvSpPr/>
           <p:nvPr/>
         </p:nvSpPr>
@@ -3618,7 +3618,7 @@
       <p:grpSpPr/>
       <p:sp>
         <p:nvSpPr>
-          <p:cNvPr id="2" name="Oval 1"/>
+          <p:cNvPr id="2" name="deckgen:decor"/>
           <p:cNvSpPr/>
           <p:nvPr/>
         </p:nvSpPr>
@@ -3648,7 +3648,7 @@
       </p:sp>
       <p:sp>
         <p:nvSpPr>
-          <p:cNvPr id="3" name="Oval 2"/>
+          <p:cNvPr id="3" name="deckgen:decor"/>
           <p:cNvSpPr/>
           <p:nvPr/>
         </p:nvSpPr>
@@ -3678,7 +3678,7 @@
       </p:sp>
       <p:sp>
         <p:nvSpPr>
-          <p:cNvPr id="4" name="Oval 3"/>
+          <p:cNvPr id="4" name="deckgen:decor"/>
           <p:cNvSpPr/>
           <p:nvPr/>
         </p:nvSpPr>
@@ -4755,7 +4755,7 @@
       <p:grpSpPr/>
       <p:sp>
         <p:nvSpPr>
-          <p:cNvPr id="2" name="Oval 1"/>
+          <p:cNvPr id="2" name="deckgen:decor"/>
           <p:cNvSpPr/>
           <p:nvPr/>
         </p:nvSpPr>
@@ -4785,7 +4785,7 @@
       </p:sp>
       <p:sp>
         <p:nvSpPr>
-          <p:cNvPr id="3" name="Oval 2"/>
+          <p:cNvPr id="3" name="deckgen:decor"/>
           <p:cNvSpPr/>
           <p:nvPr/>
         </p:nvSpPr>
@@ -5562,7 +5562,7 @@
       <p:grpSpPr/>
       <p:sp>
         <p:nvSpPr>
-          <p:cNvPr id="2" name="Oval 1"/>
+          <p:cNvPr id="2" name="deckgen:decor"/>
           <p:cNvSpPr/>
           <p:nvPr/>
         </p:nvSpPr>
@@ -5592,7 +5592,7 @@
       </p:sp>
       <p:sp>
         <p:nvSpPr>
-          <p:cNvPr id="3" name="Oval 2"/>
+          <p:cNvPr id="3" name="deckgen:decor"/>
           <p:cNvSpPr/>
           <p:nvPr/>
         </p:nvSpPr>
@@ -5622,7 +5622,7 @@
       </p:sp>
       <p:sp>
         <p:nvSpPr>
-          <p:cNvPr id="4" name="Oval 3"/>
+          <p:cNvPr id="4" name="deckgen:decor"/>
           <p:cNvSpPr/>
           <p:nvPr/>
         </p:nvSpPr>
@@ -6553,7 +6553,7 @@
       <p:grpSpPr/>
       <p:sp>
         <p:nvSpPr>
-          <p:cNvPr id="2" name="Oval 1"/>
+          <p:cNvPr id="2" name="deckgen:decor"/>
           <p:cNvSpPr/>
           <p:nvPr/>
         </p:nvSpPr>
@@ -6583,7 +6583,7 @@
       </p:sp>
       <p:sp>
         <p:nvSpPr>
-          <p:cNvPr id="3" name="Oval 2"/>
+          <p:cNvPr id="3" name="deckgen:decor"/>
           <p:cNvSpPr/>
           <p:nvPr/>
         </p:nvSpPr>
@@ -6613,7 +6613,7 @@
       </p:sp>
       <p:sp>
         <p:nvSpPr>
-          <p:cNvPr id="4" name="Oval 3"/>
+          <p:cNvPr id="4" name="deckgen:decor"/>
           <p:cNvSpPr/>
           <p:nvPr/>
         </p:nvSpPr>
@@ -6894,7 +6894,7 @@
                 <a:ea typeface="Pretendard"/>
                 <a:cs typeface="Pretendard"/>
               </a:rPr>
-              <a:t>1 환경</a:t>
+              <a:t>1. 환경</a:t>
             </a:r>
           </a:p>
         </p:txBody>
@@ -7058,7 +7058,7 @@
                 <a:ea typeface="Pretendard"/>
                 <a:cs typeface="Pretendard"/>
               </a:rPr>
-              <a:t>2 적재</a:t>
+              <a:t>2. 적재</a:t>
             </a:r>
           </a:p>
         </p:txBody>
@@ -7222,7 +7222,7 @@
                 <a:ea typeface="Pretendard"/>
                 <a:cs typeface="Pretendard"/>
               </a:rPr>
-              <a:t>3 집계</a:t>
+              <a:t>3. 집계</a:t>
             </a:r>
           </a:p>
         </p:txBody>
@@ -7386,7 +7386,7 @@
                 <a:ea typeface="Pretendard"/>
                 <a:cs typeface="Pretendard"/>
               </a:rPr>
-              <a:t>4 시계열</a:t>
+              <a:t>4. 시계열</a:t>
             </a:r>
           </a:p>
         </p:txBody>
@@ -7550,7 +7550,7 @@
                 <a:ea typeface="Pretendard"/>
                 <a:cs typeface="Pretendard"/>
               </a:rPr>
-              <a:t>5 인덱스</a:t>
+              <a:t>5. 인덱스</a:t>
             </a:r>
           </a:p>
         </p:txBody>
@@ -7746,7 +7746,7 @@
       <p:grpSpPr/>
       <p:sp>
         <p:nvSpPr>
-          <p:cNvPr id="2" name="Oval 1"/>
+          <p:cNvPr id="2" name="deckgen:decor"/>
           <p:cNvSpPr/>
           <p:nvPr/>
         </p:nvSpPr>
@@ -7776,7 +7776,7 @@
       </p:sp>
       <p:sp>
         <p:nvSpPr>
-          <p:cNvPr id="3" name="Oval 2"/>
+          <p:cNvPr id="3" name="deckgen:decor"/>
           <p:cNvSpPr/>
           <p:nvPr/>
         </p:nvSpPr>
@@ -7806,7 +7806,7 @@
       </p:sp>
       <p:sp>
         <p:nvSpPr>
-          <p:cNvPr id="4" name="Oval 3"/>
+          <p:cNvPr id="4" name="deckgen:decor"/>
           <p:cNvSpPr/>
           <p:nvPr/>
         </p:nvSpPr>
@@ -8844,7 +8844,7 @@
       <p:grpSpPr/>
       <p:sp>
         <p:nvSpPr>
-          <p:cNvPr id="2" name="Oval 1"/>
+          <p:cNvPr id="2" name="deckgen:decor"/>
           <p:cNvSpPr/>
           <p:nvPr/>
         </p:nvSpPr>
@@ -8874,7 +8874,7 @@
       </p:sp>
       <p:sp>
         <p:nvSpPr>
-          <p:cNvPr id="3" name="Oval 2"/>
+          <p:cNvPr id="3" name="deckgen:decor"/>
           <p:cNvSpPr/>
           <p:nvPr/>
         </p:nvSpPr>
@@ -8904,7 +8904,7 @@
       </p:sp>
       <p:sp>
         <p:nvSpPr>
-          <p:cNvPr id="4" name="Oval 3"/>
+          <p:cNvPr id="4" name="deckgen:decor"/>
           <p:cNvSpPr/>
           <p:nvPr/>
         </p:nvSpPr>
@@ -10038,7 +10038,7 @@
       <p:grpSpPr/>
       <p:sp>
         <p:nvSpPr>
-          <p:cNvPr id="2" name="Oval 1"/>
+          <p:cNvPr id="2" name="deckgen:decor"/>
           <p:cNvSpPr/>
           <p:nvPr/>
         </p:nvSpPr>
@@ -10068,7 +10068,7 @@
       </p:sp>
       <p:sp>
         <p:nvSpPr>
-          <p:cNvPr id="3" name="Oval 2"/>
+          <p:cNvPr id="3" name="deckgen:decor"/>
           <p:cNvSpPr/>
           <p:nvPr/>
         </p:nvSpPr>
@@ -10098,7 +10098,7 @@
       </p:sp>
       <p:sp>
         <p:nvSpPr>
-          <p:cNvPr id="4" name="Oval 3"/>
+          <p:cNvPr id="4" name="deckgen:decor"/>
           <p:cNvSpPr/>
           <p:nvPr/>
         </p:nvSpPr>
@@ -10957,7 +10957,7 @@
       <p:grpSpPr/>
       <p:sp>
         <p:nvSpPr>
-          <p:cNvPr id="2" name="Oval 1"/>
+          <p:cNvPr id="2" name="deckgen:decor"/>
           <p:cNvSpPr/>
           <p:nvPr/>
         </p:nvSpPr>
@@ -10987,7 +10987,7 @@
       </p:sp>
       <p:sp>
         <p:nvSpPr>
-          <p:cNvPr id="3" name="Oval 2"/>
+          <p:cNvPr id="3" name="deckgen:decor"/>
           <p:cNvSpPr/>
           <p:nvPr/>
         </p:nvSpPr>
@@ -11017,7 +11017,7 @@
       </p:sp>
       <p:sp>
         <p:nvSpPr>
-          <p:cNvPr id="4" name="Oval 3"/>
+          <p:cNvPr id="4" name="deckgen:decor"/>
           <p:cNvSpPr/>
           <p:nvPr/>
         </p:nvSpPr>
@@ -12668,7 +12668,7 @@
       <p:grpSpPr/>
       <p:sp>
         <p:nvSpPr>
-          <p:cNvPr id="2" name="Oval 1"/>
+          <p:cNvPr id="2" name="deckgen:decor"/>
           <p:cNvSpPr/>
           <p:nvPr/>
         </p:nvSpPr>
@@ -12698,7 +12698,7 @@
       </p:sp>
       <p:sp>
         <p:nvSpPr>
-          <p:cNvPr id="3" name="Oval 2"/>
+          <p:cNvPr id="3" name="deckgen:decor"/>
           <p:cNvSpPr/>
           <p:nvPr/>
         </p:nvSpPr>
@@ -12728,7 +12728,7 @@
       </p:sp>
       <p:sp>
         <p:nvSpPr>
-          <p:cNvPr id="4" name="Oval 3"/>
+          <p:cNvPr id="4" name="deckgen:decor"/>
           <p:cNvSpPr/>
           <p:nvPr/>
         </p:nvSpPr>
@@ -13766,7 +13766,7 @@
       <p:grpSpPr/>
       <p:sp>
         <p:nvSpPr>
-          <p:cNvPr id="2" name="Oval 1"/>
+          <p:cNvPr id="2" name="deckgen:decor"/>
           <p:cNvSpPr/>
           <p:nvPr/>
         </p:nvSpPr>
@@ -13796,7 +13796,7 @@
       </p:sp>
       <p:sp>
         <p:nvSpPr>
-          <p:cNvPr id="3" name="Oval 2"/>
+          <p:cNvPr id="3" name="deckgen:decor"/>
           <p:cNvSpPr/>
           <p:nvPr/>
         </p:nvSpPr>
@@ -13826,7 +13826,7 @@
       </p:sp>
       <p:sp>
         <p:nvSpPr>
-          <p:cNvPr id="4" name="Oval 3"/>
+          <p:cNvPr id="4" name="deckgen:decor"/>
           <p:cNvSpPr/>
           <p:nvPr/>
         </p:nvSpPr>
@@ -14032,7 +14032,7 @@
       </p:sp>
       <p:sp>
         <p:nvSpPr>
-          <p:cNvPr id="10" name="TextBox 9"/>
+          <p:cNvPr id="10" name="deckgen:ornament"/>
           <p:cNvSpPr txBox="1"/>
           <p:nvPr/>
         </p:nvSpPr>
@@ -14217,7 +14217,7 @@
       </p:sp>
       <p:sp>
         <p:nvSpPr>
-          <p:cNvPr id="14" name="TextBox 13"/>
+          <p:cNvPr id="14" name="deckgen:ornament"/>
           <p:cNvSpPr txBox="1"/>
           <p:nvPr/>
         </p:nvSpPr>
@@ -14402,7 +14402,7 @@
       </p:sp>
       <p:sp>
         <p:nvSpPr>
-          <p:cNvPr id="18" name="TextBox 17"/>
+          <p:cNvPr id="18" name="deckgen:ornament"/>
           <p:cNvSpPr txBox="1"/>
           <p:nvPr/>
         </p:nvSpPr>
